--- a/decks/geog-tectonic-hazards/geog-tectonic-hazards_ch1_natural-hazards.pptx
+++ b/decks/geog-tectonic-hazards/geog-tectonic-hazards_ch1_natural-hazards.pptx
@@ -127,30 +127,30 @@
   <p:extLst>
     <p:ext uri="{521415D9-36F7-43E2-AB2F-B90AF26B5E84}">
       <p14:sectionLst xmlns:p14="http://schemas.microsoft.com/office/powerpoint/2010/main">
-        <p14:section name="Opening" id="{7307a9ee-aa05-fb12-a8ae-6f270e1ee918}">
+        <p14:section name="Opening" id="{7abb55f3-b133-9dd4-82bd-229273fc4995}">
           <p14:sldIdLst>
             <p14:sldId id="256"/>
           </p14:sldIdLst>
         </p14:section>
-        <p14:section name="Gate" id="{09d76089-f20b-152a-9347-61b295301aac}">
+        <p14:section name="Gate" id="{becdf634-4c19-2d3e-f195-6ce48d99adcf}">
           <p14:sldIdLst>
             <p14:sldId id="257"/>
             <p14:sldId id="258"/>
           </p14:sldIdLst>
         </p14:section>
-        <p14:section name="Pre-teach" id="{b29e15d5-0377-8424-7704-6459cbe3325c}">
+        <p14:section name="Pre-teach" id="{42b9e0ab-693b-6c68-d402-834b3e253097}">
           <p14:sldIdLst>
             <p14:sldId id="259"/>
             <p14:sldId id="260"/>
           </p14:sldIdLst>
         </p14:section>
-        <p14:section name="Read-along" id="{62a4e395-5b9b-440e-2fc5-5186a70e820f}">
+        <p14:section name="Read-along" id="{398b8c82-6863-24c1-840d-01c4a309d64d}">
           <p14:sldIdLst>
             <p14:sldId id="261"/>
             <p14:sldId id="262"/>
           </p14:sldIdLst>
         </p14:section>
-        <p14:section name="Teach" id="{e42cfdbb-7766-0d82-35e2-95be33467110}">
+        <p14:section name="Teach" id="{04113fb0-c34d-9582-dd81-05f41a19d0ce}">
           <p14:sldIdLst>
             <p14:sldId id="263"/>
             <p14:sldId id="264"/>
@@ -160,7 +160,7 @@
             <p14:sldId id="268"/>
           </p14:sldIdLst>
         </p14:section>
-        <p14:section name="Routes" id="{d9094161-afb0-3885-a313-4eb0de25d1b9}">
+        <p14:section name="Routes" id="{aa4209fb-9343-52a1-2bce-9022d2027cea}">
           <p14:sldIdLst>
             <p14:sldId id="269"/>
             <p14:sldId id="270"/>
@@ -168,12 +168,12 @@
             <p14:sldId id="272"/>
           </p14:sldIdLst>
         </p14:section>
-        <p14:section name="Close" id="{6038138a-f33d-b110-5475-919d34d7160c}">
+        <p14:section name="Close" id="{16b720f7-6b0c-64a5-b61d-4a06afd15853}">
           <p14:sldIdLst>
             <p14:sldId id="273"/>
           </p14:sldIdLst>
         </p14:section>
-        <p14:section name="Answers" id="{ba0fa2f5-1973-8889-8c69-555631a122ac}">
+        <p14:section name="Answers" id="{1f4d9942-464f-ffc4-3512-6f3b9b89638a}">
           <p14:sldIdLst>
             <p14:sldId id="274"/>
             <p14:sldId id="275"/>
